--- a/exports/实习推送_企业名录与收费流程说明.pptx
+++ b/exports/实习推送_企业名录与收费流程说明.pptx
@@ -3830,7 +3830,7 @@
                 <a:latin typeface="微软雅黑"/>
                 <a:ea typeface="微软雅黑"/>
               </a:rPr>
-              <a:t>•  高中生 → 优先公益证明 / 轻量远程课题</a:t>
+              <a:t>•  高中生 → 具身/科技项目实习（不卖开证明）</a:t>
             </a:r>
           </a:p>
           <a:p>
@@ -3864,7 +3864,7 @@
                 <a:latin typeface="微软雅黑"/>
                 <a:ea typeface="微软雅黑"/>
               </a:rPr>
-              <a:t>•  大学生综合 → AI 应用 / SaaS / 数据标注质检</a:t>
+              <a:t>•  大学生综合 → AI 应用 / 数据 / 产品课题</a:t>
             </a:r>
           </a:p>
           <a:p>
@@ -5747,7 +5747,7 @@
                 <a:latin typeface="微软雅黑"/>
                 <a:ea typeface="微软雅黑"/>
               </a:rPr>
-              <a:t>•  学生收费：199 → 11,800 分档</a:t>
+              <a:t>•  在售：5,480 / 11,800 / 9,800</a:t>
             </a:r>
           </a:p>
           <a:p>
@@ -5764,7 +5764,7 @@
                 <a:latin typeface="微软雅黑"/>
                 <a:ea typeface="微软雅黑"/>
               </a:rPr>
-              <a:t>•  主推商业档标准价 5,480</a:t>
+              <a:t>•  已停：199 / 699 / 1,680 开证明</a:t>
             </a:r>
           </a:p>
           <a:p>
@@ -5798,7 +5798,7 @@
                 <a:latin typeface="微软雅黑"/>
                 <a:ea typeface="微软雅黑"/>
               </a:rPr>
-              <a:t>•  商业档单人毛利约 1,000–6,000</a:t>
+              <a:t>•  单人毛利约 1,000–6,300</a:t>
             </a:r>
           </a:p>
           <a:p>
@@ -5998,7 +5998,7 @@
                 <a:latin typeface="微软雅黑"/>
                 <a:ea typeface="微软雅黑"/>
               </a:rPr>
-              <a:t>•  →实习→结业→出证明</a:t>
+              <a:t>•  →真实课题实习→结业交付</a:t>
             </a:r>
           </a:p>
           <a:p>
@@ -6015,7 +6015,7 @@
                 <a:latin typeface="微软雅黑"/>
                 <a:ea typeface="微软雅黑"/>
               </a:rPr>
-              <a:t>•  匹配 2 日 / 推送 5 日 / 证明 3 日</a:t>
+              <a:t>•  匹配 2 日 / 推送 5 日 / 交付 3 日</a:t>
             </a:r>
           </a:p>
           <a:p>
@@ -6690,7 +6690,7 @@
                 <a:latin typeface="微软雅黑"/>
                 <a:ea typeface="微软雅黑"/>
               </a:rPr>
-              <a:t>•  学生端收什么、收多少</a:t>
+              <a:t>•  只做高价值商业/就业档</a:t>
             </a:r>
           </a:p>
           <a:p>
@@ -6707,7 +6707,7 @@
                 <a:latin typeface="微软雅黑"/>
                 <a:ea typeface="微软雅黑"/>
               </a:rPr>
-              <a:t>•  分公益 / 商业 / 就业三档</a:t>
+              <a:t>•  已取消 199/699/1680 开证明</a:t>
             </a:r>
           </a:p>
           <a:p>
@@ -11610,7 +11610,7 @@
                 <a:latin typeface="微软雅黑"/>
                 <a:ea typeface="微软雅黑"/>
               </a:rPr>
-              <a:t>收什么、收多少、含什么 —— 对外报价以此表为准</a:t>
+              <a:t>已取消开证明低价档；只做真实企业课题的高价值业务</a:t>
             </a:r>
           </a:p>
         </p:txBody>
@@ -11695,17 +11695,99 @@
           </a:p>
         </p:txBody>
       </p:sp>
+      <p:sp>
+        <p:nvSpPr>
+          <p:cNvPr id="8" name="Rounded Rectangle 7"/>
+          <p:cNvSpPr/>
+          <p:nvPr/>
+        </p:nvSpPr>
+        <p:spPr>
+          <a:xfrm>
+            <a:off x="365760" y="1280160"/>
+            <a:ext cx="11430000" cy="640080"/>
+          </a:xfrm>
+          <a:prstGeom prst="roundRect">
+            <a:avLst>
+              <a:gd name="adj" fmla="val 8000"/>
+            </a:avLst>
+          </a:prstGeom>
+          <a:solidFill>
+            <a:srgbClr val="E8F3F1"/>
+          </a:solidFill>
+          <a:ln>
+            <a:noFill/>
+          </a:ln>
+          <a:effectLst/>
+        </p:spPr>
+        <p:style>
+          <a:lnRef idx="1">
+            <a:schemeClr val="accent1"/>
+          </a:lnRef>
+          <a:fillRef idx="3">
+            <a:schemeClr val="accent1"/>
+          </a:fillRef>
+          <a:effectRef idx="2">
+            <a:schemeClr val="accent1"/>
+          </a:effectRef>
+          <a:fontRef idx="minor">
+            <a:schemeClr val="lt1"/>
+          </a:fontRef>
+        </p:style>
+        <p:txBody>
+          <a:bodyPr rtlCol="0" anchor="ctr"/>
+          <a:lstStyle/>
+          <a:p>
+            <a:pPr algn="ctr"/>
+          </a:p>
+        </p:txBody>
+      </p:sp>
+      <p:sp>
+        <p:nvSpPr>
+          <p:cNvPr id="9" name="TextBox 8"/>
+          <p:cNvSpPr txBox="1"/>
+          <p:nvPr/>
+        </p:nvSpPr>
+        <p:spPr>
+          <a:xfrm>
+            <a:off x="548640" y="1371600"/>
+            <a:ext cx="11064240" cy="457200"/>
+          </a:xfrm>
+          <a:prstGeom prst="rect">
+            <a:avLst/>
+          </a:prstGeom>
+          <a:noFill/>
+        </p:spPr>
+        <p:txBody>
+          <a:bodyPr wrap="square" lIns="0" rIns="0" tIns="0" bIns="0" anchor="ctr">
+            <a:spAutoFit/>
+          </a:bodyPr>
+          <a:lstStyle/>
+          <a:p>
+            <a:pPr algn="l"/>
+            <a:r>
+              <a:rPr sz="1300" b="1">
+                <a:solidFill>
+                  <a:srgbClr val="C06A2F"/>
+                </a:solidFill>
+                <a:latin typeface="微软雅黑"/>
+                <a:ea typeface="微软雅黑"/>
+              </a:rPr>
+              <a:t>战略取舍：199 / 699 / 1,680「开证明」业务费用低、核验与舆情成本高 → 一律停售；证明仅作为高价值项目结业交付物，不单独售卖。</a:t>
+            </a:r>
+          </a:p>
+        </p:txBody>
+      </p:sp>
       <p:graphicFrame>
         <p:nvGraphicFramePr>
-          <p:cNvPr id="8" name="Table 7"/>
+          <p:cNvPr id="10" name="Table 9"/>
           <p:cNvGraphicFramePr>
             <a:graphicFrameLocks noGrp="1"/>
           </p:cNvGraphicFramePr>
           <p:nvPr/>
         </p:nvGraphicFramePr>
         <p:xfrm>
-          <a:off x="320040" y="1325880"/>
-          <a:ext cx="11521440" cy="4206240"/>
+          <a:off x="320040" y="2103120"/>
+          <a:ext cx="11521440" cy="3474720"/>
         </p:xfrm>
         <a:graphic>
           <a:graphicData uri="http://schemas.openxmlformats.org/drawingml/2006/table">
@@ -11720,7 +11802,7 @@
                 <a:gridCol w="2304288"/>
                 <a:gridCol w="2304288"/>
               </a:tblGrid>
-              <a:tr h="600891">
+              <a:tr h="579120">
                 <a:tc>
                   <a:txBody>
                     <a:bodyPr/>
@@ -11842,7 +11924,7 @@
                   </a:tcPr>
                 </a:tc>
               </a:tr>
-              <a:tr h="600891">
+              <a:tr h="579120">
                 <a:tc>
                   <a:txBody>
                     <a:bodyPr wrap="square"/>
@@ -11857,7 +11939,7 @@
                           <a:latin typeface="微软雅黑"/>
                           <a:ea typeface="微软雅黑"/>
                         </a:rPr>
-                        <a:t>线上实习·证明版</a:t>
+                        <a:t>科技/具身智能项目实习</a:t>
                       </a:r>
                     </a:p>
                   </a:txBody>
@@ -11881,7 +11963,7 @@
                           <a:latin typeface="微软雅黑"/>
                           <a:ea typeface="微软雅黑"/>
                         </a:rPr>
-                        <a:t>199</a:t>
+                        <a:t>5,480</a:t>
                       </a:r>
                     </a:p>
                   </a:txBody>
@@ -11905,7 +11987,7 @@
                           <a:latin typeface="微软雅黑"/>
                           <a:ea typeface="微软雅黑"/>
                         </a:rPr>
-                        <a:t>任务+编号证明</a:t>
+                        <a:t>真实企业课题 4–6 周 + 周报 + 结业证明</a:t>
                       </a:r>
                     </a:p>
                   </a:txBody>
@@ -11929,7 +12011,7 @@
                           <a:latin typeface="微软雅黑"/>
                           <a:ea typeface="微软雅黑"/>
                         </a:rPr>
-                        <a:t>企业驻场、推荐信</a:t>
+                        <a:t>包录取/包转正</a:t>
                       </a:r>
                     </a:p>
                   </a:txBody>
@@ -11953,7 +12035,7 @@
                           <a:latin typeface="微软雅黑"/>
                           <a:ea typeface="微软雅黑"/>
                         </a:rPr>
-                        <a:t>高中生/体验</a:t>
+                        <a:t>高中生优生/大学生</a:t>
                       </a:r>
                     </a:p>
                   </a:txBody>
@@ -11964,7 +12046,7 @@
                   </a:tcPr>
                 </a:tc>
               </a:tr>
-              <a:tr h="600891">
+              <a:tr h="579120">
                 <a:tc>
                   <a:txBody>
                     <a:bodyPr wrap="square"/>
@@ -11979,7 +12061,7 @@
                           <a:latin typeface="微软雅黑"/>
                           <a:ea typeface="微软雅黑"/>
                         </a:rPr>
-                        <a:t>证明+申报支持</a:t>
+                        <a:t>上海 AI / 头部通道营</a:t>
                       </a:r>
                     </a:p>
                   </a:txBody>
@@ -12003,7 +12085,7 @@
                           <a:latin typeface="微软雅黑"/>
                           <a:ea typeface="微软雅黑"/>
                         </a:rPr>
-                        <a:t>699</a:t>
+                        <a:t>11,800</a:t>
                       </a:r>
                     </a:p>
                   </a:txBody>
@@ -12027,7 +12109,7 @@
                           <a:latin typeface="微软雅黑"/>
                           <a:ea typeface="微软雅黑"/>
                         </a:rPr>
-                        <a:t>证明+申报邮箱+材料清单</a:t>
+                        <a:t>品牌项目 + 导师 + 答辩 + 结业证明</a:t>
                       </a:r>
                     </a:p>
                   </a:txBody>
@@ -12051,7 +12133,7 @@
                           <a:latin typeface="微软雅黑"/>
                           <a:ea typeface="微软雅黑"/>
                         </a:rPr>
-                        <a:t>推荐信深度润色</a:t>
+                        <a:t>包转正/包录取</a:t>
                       </a:r>
                     </a:p>
                   </a:txBody>
@@ -12075,7 +12157,7 @@
                           <a:latin typeface="微软雅黑"/>
                           <a:ea typeface="微软雅黑"/>
                         </a:rPr>
-                        <a:t>高中申请</a:t>
+                        <a:t>大学生优生</a:t>
                       </a:r>
                     </a:p>
                   </a:txBody>
@@ -12086,7 +12168,7 @@
                   </a:tcPr>
                 </a:tc>
               </a:tr>
-              <a:tr h="600891">
+              <a:tr h="579120">
                 <a:tc>
                   <a:txBody>
                     <a:bodyPr wrap="square"/>
@@ -12101,7 +12183,7 @@
                           <a:latin typeface="微软雅黑"/>
                           <a:ea typeface="微软雅黑"/>
                         </a:rPr>
-                        <a:t>证明+推荐信协助</a:t>
+                        <a:t>毕业生就业转化包</a:t>
                       </a:r>
                     </a:p>
                   </a:txBody>
@@ -12125,7 +12207,7 @@
                           <a:latin typeface="微软雅黑"/>
                           <a:ea typeface="微软雅黑"/>
                         </a:rPr>
-                        <a:t>1,680</a:t>
+                        <a:t>9,800</a:t>
                       </a:r>
                     </a:p>
                   </a:txBody>
@@ -12149,7 +12231,7 @@
                           <a:latin typeface="微软雅黑"/>
                           <a:ea typeface="微软雅黑"/>
                         </a:rPr>
-                        <a:t>模板+润色+导师签字流</a:t>
+                        <a:t>过渡实习 + 内推辅导 + 复盘 + 证明</a:t>
                       </a:r>
                     </a:p>
                   </a:txBody>
@@ -12173,7 +12255,7 @@
                           <a:latin typeface="微软雅黑"/>
                           <a:ea typeface="微软雅黑"/>
                         </a:rPr>
-                        <a:t>包录取</a:t>
+                        <a:t>包 Offer</a:t>
                       </a:r>
                     </a:p>
                   </a:txBody>
@@ -12197,7 +12279,7 @@
                           <a:latin typeface="微软雅黑"/>
                           <a:ea typeface="微软雅黑"/>
                         </a:rPr>
-                        <a:t>海外申请</a:t>
+                        <a:t>毕业生</a:t>
                       </a:r>
                     </a:p>
                   </a:txBody>
@@ -12208,7 +12290,7 @@
                   </a:tcPr>
                 </a:tc>
               </a:tr>
-              <a:tr h="600891">
+              <a:tr h="579120">
                 <a:tc>
                   <a:txBody>
                     <a:bodyPr wrap="square"/>
@@ -12223,7 +12305,7 @@
                           <a:latin typeface="微软雅黑"/>
                           <a:ea typeface="微软雅黑"/>
                         </a:rPr>
-                        <a:t>科技/具身智能项目实习</a:t>
+                        <a:t>增值：推荐信加购（可选）</a:t>
                       </a:r>
                     </a:p>
                   </a:txBody>
@@ -12247,7 +12329,7 @@
                           <a:latin typeface="微软雅黑"/>
                           <a:ea typeface="微软雅黑"/>
                         </a:rPr>
-                        <a:t>5,480</a:t>
+                        <a:t>+1,500</a:t>
                       </a:r>
                     </a:p>
                   </a:txBody>
@@ -12271,7 +12353,7 @@
                           <a:latin typeface="微软雅黑"/>
                           <a:ea typeface="微软雅黑"/>
                         </a:rPr>
-                        <a:t>4–6周项目+周报+证明</a:t>
+                        <a:t>仅限已参加上述项目学员</a:t>
                       </a:r>
                     </a:p>
                   </a:txBody>
@@ -12295,7 +12377,7 @@
                           <a:latin typeface="微软雅黑"/>
                           <a:ea typeface="微软雅黑"/>
                         </a:rPr>
-                        <a:t>大厂品牌背书</a:t>
+                        <a:t>不可单独购买</a:t>
                       </a:r>
                     </a:p>
                   </a:txBody>
@@ -12319,7 +12401,7 @@
                           <a:latin typeface="微软雅黑"/>
                           <a:ea typeface="微软雅黑"/>
                         </a:rPr>
-                        <a:t>大学生</a:t>
+                        <a:t>有申请/求职需要者</a:t>
                       </a:r>
                     </a:p>
                   </a:txBody>
@@ -12330,7 +12412,7 @@
                   </a:tcPr>
                 </a:tc>
               </a:tr>
-              <a:tr h="600891">
+              <a:tr h="579120">
                 <a:tc>
                   <a:txBody>
                     <a:bodyPr wrap="square"/>
@@ -12345,7 +12427,7 @@
                           <a:latin typeface="微软雅黑"/>
                           <a:ea typeface="微软雅黑"/>
                         </a:rPr>
-                        <a:t>上海 AI / 头部通道营</a:t>
+                        <a:t>机构团购</a:t>
                       </a:r>
                     </a:p>
                   </a:txBody>
@@ -12369,7 +12451,7 @@
                           <a:latin typeface="微软雅黑"/>
                           <a:ea typeface="微软雅黑"/>
                         </a:rPr>
-                        <a:t>11,800</a:t>
+                        <a:t>标准价 6–8 折</a:t>
                       </a:r>
                     </a:p>
                   </a:txBody>
@@ -12393,7 +12475,7 @@
                           <a:latin typeface="微软雅黑"/>
                           <a:ea typeface="微软雅黑"/>
                         </a:rPr>
-                        <a:t>品牌项目+导师+答辩</a:t>
+                        <a:t>批量名额 + 统一课题交付</a:t>
                       </a:r>
                     </a:p>
                   </a:txBody>
@@ -12417,7 +12499,7 @@
                           <a:latin typeface="微软雅黑"/>
                           <a:ea typeface="微软雅黑"/>
                         </a:rPr>
-                        <a:t>包转正/包录取</a:t>
+                        <a:t>个性化造假包装</a:t>
                       </a:r>
                     </a:p>
                   </a:txBody>
@@ -12441,135 +12523,13 @@
                           <a:latin typeface="微软雅黑"/>
                           <a:ea typeface="微软雅黑"/>
                         </a:rPr>
-                        <a:t>大学生优生</a:t>
+                        <a:t>学校/教培 B 端</a:t>
                       </a:r>
                     </a:p>
                   </a:txBody>
                   <a:tcPr marL="45720" marR="45720" marT="18288" marB="18288">
                     <a:solidFill>
                       <a:srgbClr val="FFFFFF"/>
-                    </a:solidFill>
-                  </a:tcPr>
-                </a:tc>
-              </a:tr>
-              <a:tr h="600894">
-                <a:tc>
-                  <a:txBody>
-                    <a:bodyPr wrap="square"/>
-                    <a:lstStyle/>
-                    <a:p>
-                      <a:pPr algn="l"/>
-                      <a:r>
-                        <a:rPr sz="1100" b="0">
-                          <a:solidFill>
-                            <a:srgbClr val="1A2A33"/>
-                          </a:solidFill>
-                          <a:latin typeface="微软雅黑"/>
-                          <a:ea typeface="微软雅黑"/>
-                        </a:rPr>
-                        <a:t>毕业生就业转化包</a:t>
-                      </a:r>
-                    </a:p>
-                  </a:txBody>
-                  <a:tcPr marL="45720" marR="45720" marT="18288" marB="18288">
-                    <a:solidFill>
-                      <a:srgbClr val="E8F3F1"/>
-                    </a:solidFill>
-                  </a:tcPr>
-                </a:tc>
-                <a:tc>
-                  <a:txBody>
-                    <a:bodyPr wrap="square"/>
-                    <a:lstStyle/>
-                    <a:p>
-                      <a:pPr algn="l"/>
-                      <a:r>
-                        <a:rPr sz="1100" b="0">
-                          <a:solidFill>
-                            <a:srgbClr val="1A2A33"/>
-                          </a:solidFill>
-                          <a:latin typeface="微软雅黑"/>
-                          <a:ea typeface="微软雅黑"/>
-                        </a:rPr>
-                        <a:t>9,800</a:t>
-                      </a:r>
-                    </a:p>
-                  </a:txBody>
-                  <a:tcPr marL="45720" marR="45720" marT="18288" marB="18288">
-                    <a:solidFill>
-                      <a:srgbClr val="E8F3F1"/>
-                    </a:solidFill>
-                  </a:tcPr>
-                </a:tc>
-                <a:tc>
-                  <a:txBody>
-                    <a:bodyPr wrap="square"/>
-                    <a:lstStyle/>
-                    <a:p>
-                      <a:pPr algn="l"/>
-                      <a:r>
-                        <a:rPr sz="1100" b="0">
-                          <a:solidFill>
-                            <a:srgbClr val="1A2A33"/>
-                          </a:solidFill>
-                          <a:latin typeface="微软雅黑"/>
-                          <a:ea typeface="微软雅黑"/>
-                        </a:rPr>
-                        <a:t>过渡实习+内推辅导+复盘</a:t>
-                      </a:r>
-                    </a:p>
-                  </a:txBody>
-                  <a:tcPr marL="45720" marR="45720" marT="18288" marB="18288">
-                    <a:solidFill>
-                      <a:srgbClr val="E8F3F1"/>
-                    </a:solidFill>
-                  </a:tcPr>
-                </a:tc>
-                <a:tc>
-                  <a:txBody>
-                    <a:bodyPr wrap="square"/>
-                    <a:lstStyle/>
-                    <a:p>
-                      <a:pPr algn="l"/>
-                      <a:r>
-                        <a:rPr sz="1100" b="0">
-                          <a:solidFill>
-                            <a:srgbClr val="1A2A33"/>
-                          </a:solidFill>
-                          <a:latin typeface="微软雅黑"/>
-                          <a:ea typeface="微软雅黑"/>
-                        </a:rPr>
-                        <a:t>包 Offer</a:t>
-                      </a:r>
-                    </a:p>
-                  </a:txBody>
-                  <a:tcPr marL="45720" marR="45720" marT="18288" marB="18288">
-                    <a:solidFill>
-                      <a:srgbClr val="E8F3F1"/>
-                    </a:solidFill>
-                  </a:tcPr>
-                </a:tc>
-                <a:tc>
-                  <a:txBody>
-                    <a:bodyPr wrap="square"/>
-                    <a:lstStyle/>
-                    <a:p>
-                      <a:pPr algn="l"/>
-                      <a:r>
-                        <a:rPr sz="1100" b="0">
-                          <a:solidFill>
-                            <a:srgbClr val="1A2A33"/>
-                          </a:solidFill>
-                          <a:latin typeface="微软雅黑"/>
-                          <a:ea typeface="微软雅黑"/>
-                        </a:rPr>
-                        <a:t>毕业生</a:t>
-                      </a:r>
-                    </a:p>
-                  </a:txBody>
-                  <a:tcPr marL="45720" marR="45720" marT="18288" marB="18288">
-                    <a:solidFill>
-                      <a:srgbClr val="E8F3F1"/>
                     </a:solidFill>
                   </a:tcPr>
                 </a:tc>
@@ -12580,14 +12540,14 @@
       </p:graphicFrame>
       <p:sp>
         <p:nvSpPr>
-          <p:cNvPr id="9" name="TextBox 8"/>
+          <p:cNvPr id="11" name="TextBox 10"/>
           <p:cNvSpPr txBox="1"/>
           <p:nvPr/>
         </p:nvSpPr>
         <p:spPr>
           <a:xfrm>
-            <a:off x="457200" y="5669280"/>
-            <a:ext cx="11247120" cy="457200"/>
+            <a:off x="457200" y="5760720"/>
+            <a:ext cx="11247120" cy="365760"/>
           </a:xfrm>
           <a:prstGeom prst="rect">
             <a:avLst/>
@@ -12609,7 +12569,7 @@
                 <a:latin typeface="微软雅黑"/>
                 <a:ea typeface="微软雅黑"/>
               </a:rPr>
-              <a:t>支付节奏：定金 30% → 开营/推送确认 40% → 结业出具证明 30%。学校/机构团购：标准价 6–8 折。</a:t>
+              <a:t>支付节奏：定金 30% → 开营/企业确认接收 40% → 结业交付 30%。</a:t>
             </a:r>
           </a:p>
         </p:txBody>
@@ -12787,7 +12747,7 @@
                 <a:latin typeface="微软雅黑"/>
                 <a:ea typeface="微软雅黑"/>
               </a:rPr>
-              <a:t>「收了学生再推过去」—— 单人通道成本与毛利对照</a:t>
+              <a:t>「收了学生再推过去」—— 只测算在售高价值档</a:t>
             </a:r>
           </a:p>
         </p:txBody>
@@ -12881,8 +12841,8 @@
           <p:nvPr/>
         </p:nvGraphicFramePr>
         <p:xfrm>
-          <a:off x="274320" y="1325880"/>
-          <a:ext cx="11612880" cy="3474720"/>
+          <a:off x="274320" y="1371600"/>
+          <a:ext cx="11612880" cy="2560320"/>
         </p:xfrm>
         <a:graphic>
           <a:graphicData uri="http://schemas.openxmlformats.org/drawingml/2006/table">
@@ -12899,7 +12859,7 @@
                 <a:gridCol w="1658982"/>
                 <a:gridCol w="1658988"/>
               </a:tblGrid>
-              <a:tr h="579120">
+              <a:tr h="640080">
                 <a:tc>
                   <a:txBody>
                     <a:bodyPr/>
@@ -12907,7 +12867,7 @@
                     <a:p>
                       <a:pPr algn="ctr"/>
                       <a:r>
-                        <a:rPr sz="1200" b="1">
+                        <a:rPr sz="1300" b="1">
                           <a:solidFill>
                             <a:srgbClr val="FFFFFF"/>
                           </a:solidFill>
@@ -12931,7 +12891,7 @@
                     <a:p>
                       <a:pPr algn="ctr"/>
                       <a:r>
-                        <a:rPr sz="1200" b="1">
+                        <a:rPr sz="1300" b="1">
                           <a:solidFill>
                             <a:srgbClr val="FFFFFF"/>
                           </a:solidFill>
@@ -12955,7 +12915,7 @@
                     <a:p>
                       <a:pPr algn="ctr"/>
                       <a:r>
-                        <a:rPr sz="1200" b="1">
+                        <a:rPr sz="1300" b="1">
                           <a:solidFill>
                             <a:srgbClr val="FFFFFF"/>
                           </a:solidFill>
@@ -12979,7 +12939,7 @@
                     <a:p>
                       <a:pPr algn="ctr"/>
                       <a:r>
-                        <a:rPr sz="1200" b="1">
+                        <a:rPr sz="1300" b="1">
                           <a:solidFill>
                             <a:srgbClr val="FFFFFF"/>
                           </a:solidFill>
@@ -13003,7 +12963,7 @@
                     <a:p>
                       <a:pPr algn="ctr"/>
                       <a:r>
-                        <a:rPr sz="1200" b="1">
+                        <a:rPr sz="1300" b="1">
                           <a:solidFill>
                             <a:srgbClr val="FFFFFF"/>
                           </a:solidFill>
@@ -13027,7 +12987,7 @@
                     <a:p>
                       <a:pPr algn="ctr"/>
                       <a:r>
-                        <a:rPr sz="1200" b="1">
+                        <a:rPr sz="1300" b="1">
                           <a:solidFill>
                             <a:srgbClr val="FFFFFF"/>
                           </a:solidFill>
@@ -13051,7 +13011,7 @@
                     <a:p>
                       <a:pPr algn="ctr"/>
                       <a:r>
-                        <a:rPr sz="1200" b="1">
+                        <a:rPr sz="1300" b="1">
                           <a:solidFill>
                             <a:srgbClr val="FFFFFF"/>
                           </a:solidFill>
@@ -13069,22 +13029,22 @@
                   </a:tcPr>
                 </a:tc>
               </a:tr>
-              <a:tr h="579120">
-                <a:tc>
-                  <a:txBody>
-                    <a:bodyPr wrap="square"/>
-                    <a:lstStyle/>
-                    <a:p>
-                      <a:pPr algn="l"/>
-                      <a:r>
-                        <a:rPr sz="1100" b="0">
-                          <a:solidFill>
-                            <a:srgbClr val="1A2A33"/>
-                          </a:solidFill>
-                          <a:latin typeface="微软雅黑"/>
-                          <a:ea typeface="微软雅黑"/>
-                        </a:rPr>
-                        <a:t>证明版（公益）</a:t>
+              <a:tr h="640080">
+                <a:tc>
+                  <a:txBody>
+                    <a:bodyPr wrap="square"/>
+                    <a:lstStyle/>
+                    <a:p>
+                      <a:pPr algn="l"/>
+                      <a:r>
+                        <a:rPr sz="1200" b="0">
+                          <a:solidFill>
+                            <a:srgbClr val="1A2A33"/>
+                          </a:solidFill>
+                          <a:latin typeface="微软雅黑"/>
+                          <a:ea typeface="微软雅黑"/>
+                        </a:rPr>
+                        <a:t>具身/科技项目</a:t>
                       </a:r>
                     </a:p>
                   </a:txBody>
@@ -13101,14 +13061,14 @@
                     <a:p>
                       <a:pPr algn="l"/>
                       <a:r>
-                        <a:rPr sz="1100" b="0">
-                          <a:solidFill>
-                            <a:srgbClr val="1A2A33"/>
-                          </a:solidFill>
-                          <a:latin typeface="微软雅黑"/>
-                          <a:ea typeface="微软雅黑"/>
-                        </a:rPr>
-                        <a:t>199</a:t>
+                        <a:rPr sz="1200" b="0">
+                          <a:solidFill>
+                            <a:srgbClr val="1A2A33"/>
+                          </a:solidFill>
+                          <a:latin typeface="微软雅黑"/>
+                          <a:ea typeface="微软雅黑"/>
+                        </a:rPr>
+                        <a:t>5,480</a:t>
                       </a:r>
                     </a:p>
                   </a:txBody>
@@ -13125,14 +13085,14 @@
                     <a:p>
                       <a:pPr algn="l"/>
                       <a:r>
-                        <a:rPr sz="1100" b="0">
-                          <a:solidFill>
-                            <a:srgbClr val="1A2A33"/>
-                          </a:solidFill>
-                          <a:latin typeface="微软雅黑"/>
-                          <a:ea typeface="微软雅黑"/>
-                        </a:rPr>
-                        <a:t>0–50</a:t>
+                        <a:rPr sz="1200" b="0">
+                          <a:solidFill>
+                            <a:srgbClr val="1A2A33"/>
+                          </a:solidFill>
+                          <a:latin typeface="微软雅黑"/>
+                          <a:ea typeface="微软雅黑"/>
+                        </a:rPr>
+                        <a:t>2,000–2,800</a:t>
                       </a:r>
                     </a:p>
                   </a:txBody>
@@ -13149,14 +13109,14 @@
                     <a:p>
                       <a:pPr algn="l"/>
                       <a:r>
-                        <a:rPr sz="1100" b="0">
-                          <a:solidFill>
-                            <a:srgbClr val="1A2A33"/>
-                          </a:solidFill>
-                          <a:latin typeface="微软雅黑"/>
-                          <a:ea typeface="微软雅黑"/>
-                        </a:rPr>
-                        <a:t>60</a:t>
+                        <a:rPr sz="1200" b="0">
+                          <a:solidFill>
+                            <a:srgbClr val="1A2A33"/>
+                          </a:solidFill>
+                          <a:latin typeface="微软雅黑"/>
+                          <a:ea typeface="微软雅黑"/>
+                        </a:rPr>
+                        <a:t>600</a:t>
                       </a:r>
                     </a:p>
                   </a:txBody>
@@ -13173,14 +13133,14 @@
                     <a:p>
                       <a:pPr algn="l"/>
                       <a:r>
-                        <a:rPr sz="1100" b="0">
-                          <a:solidFill>
-                            <a:srgbClr val="1A2A33"/>
-                          </a:solidFill>
-                          <a:latin typeface="微软雅黑"/>
-                          <a:ea typeface="微软雅黑"/>
-                        </a:rPr>
-                        <a:t>40</a:t>
+                        <a:rPr sz="1200" b="0">
+                          <a:solidFill>
+                            <a:srgbClr val="1A2A33"/>
+                          </a:solidFill>
+                          <a:latin typeface="微软雅黑"/>
+                          <a:ea typeface="微软雅黑"/>
+                        </a:rPr>
+                        <a:t>900</a:t>
                       </a:r>
                     </a:p>
                   </a:txBody>
@@ -13197,14 +13157,14 @@
                     <a:p>
                       <a:pPr algn="l"/>
                       <a:r>
-                        <a:rPr sz="1100" b="0">
-                          <a:solidFill>
-                            <a:srgbClr val="1A2A33"/>
-                          </a:solidFill>
-                          <a:latin typeface="微软雅黑"/>
-                          <a:ea typeface="微软雅黑"/>
-                        </a:rPr>
-                        <a:t>约 150</a:t>
+                        <a:rPr sz="1200" b="0">
+                          <a:solidFill>
+                            <a:srgbClr val="1A2A33"/>
+                          </a:solidFill>
+                          <a:latin typeface="微软雅黑"/>
+                          <a:ea typeface="微软雅黑"/>
+                        </a:rPr>
+                        <a:t>约 3,900–4,500</a:t>
                       </a:r>
                     </a:p>
                   </a:txBody>
@@ -13221,14 +13181,14 @@
                     <a:p>
                       <a:pPr algn="l"/>
                       <a:r>
-                        <a:rPr sz="1100" b="0">
-                          <a:solidFill>
-                            <a:srgbClr val="1A2A33"/>
-                          </a:solidFill>
-                          <a:latin typeface="微软雅黑"/>
-                          <a:ea typeface="微软雅黑"/>
-                        </a:rPr>
-                        <a:t>约 50</a:t>
+                        <a:rPr sz="1200" b="0">
+                          <a:solidFill>
+                            <a:srgbClr val="1A2A33"/>
+                          </a:solidFill>
+                          <a:latin typeface="微软雅黑"/>
+                          <a:ea typeface="微软雅黑"/>
+                        </a:rPr>
+                        <a:t>约 1,000–1,600</a:t>
                       </a:r>
                     </a:p>
                   </a:txBody>
@@ -13239,22 +13199,22 @@
                   </a:tcPr>
                 </a:tc>
               </a:tr>
-              <a:tr h="579120">
-                <a:tc>
-                  <a:txBody>
-                    <a:bodyPr wrap="square"/>
-                    <a:lstStyle/>
-                    <a:p>
-                      <a:pPr algn="l"/>
-                      <a:r>
-                        <a:rPr sz="1100" b="0">
-                          <a:solidFill>
-                            <a:srgbClr val="1A2A33"/>
-                          </a:solidFill>
-                          <a:latin typeface="微软雅黑"/>
-                          <a:ea typeface="微软雅黑"/>
-                        </a:rPr>
-                        <a:t>申报/推荐信</a:t>
+              <a:tr h="640080">
+                <a:tc>
+                  <a:txBody>
+                    <a:bodyPr wrap="square"/>
+                    <a:lstStyle/>
+                    <a:p>
+                      <a:pPr algn="l"/>
+                      <a:r>
+                        <a:rPr sz="1200" b="0">
+                          <a:solidFill>
+                            <a:srgbClr val="1A2A33"/>
+                          </a:solidFill>
+                          <a:latin typeface="微软雅黑"/>
+                          <a:ea typeface="微软雅黑"/>
+                        </a:rPr>
+                        <a:t>上海 AI 通道营</a:t>
                       </a:r>
                     </a:p>
                   </a:txBody>
@@ -13271,14 +13231,14 @@
                     <a:p>
                       <a:pPr algn="l"/>
                       <a:r>
-                        <a:rPr sz="1100" b="0">
-                          <a:solidFill>
-                            <a:srgbClr val="1A2A33"/>
-                          </a:solidFill>
-                          <a:latin typeface="微软雅黑"/>
-                          <a:ea typeface="微软雅黑"/>
-                        </a:rPr>
-                        <a:t>699–1,680</a:t>
+                        <a:rPr sz="1200" b="0">
+                          <a:solidFill>
+                            <a:srgbClr val="1A2A33"/>
+                          </a:solidFill>
+                          <a:latin typeface="微软雅黑"/>
+                          <a:ea typeface="微软雅黑"/>
+                        </a:rPr>
+                        <a:t>11,800</a:t>
                       </a:r>
                     </a:p>
                   </a:txBody>
@@ -13295,14 +13255,14 @@
                     <a:p>
                       <a:pPr algn="l"/>
                       <a:r>
-                        <a:rPr sz="1100" b="0">
-                          <a:solidFill>
-                            <a:srgbClr val="1A2A33"/>
-                          </a:solidFill>
-                          <a:latin typeface="微软雅黑"/>
-                          <a:ea typeface="微软雅黑"/>
-                        </a:rPr>
-                        <a:t>0–100</a:t>
+                        <a:rPr sz="1200" b="0">
+                          <a:solidFill>
+                            <a:srgbClr val="1A2A33"/>
+                          </a:solidFill>
+                          <a:latin typeface="微软雅黑"/>
+                          <a:ea typeface="微软雅黑"/>
+                        </a:rPr>
+                        <a:t>3,000–4,200</a:t>
                       </a:r>
                     </a:p>
                   </a:txBody>
@@ -13319,14 +13279,14 @@
                     <a:p>
                       <a:pPr algn="l"/>
                       <a:r>
-                        <a:rPr sz="1100" b="0">
-                          <a:solidFill>
-                            <a:srgbClr val="1A2A33"/>
-                          </a:solidFill>
-                          <a:latin typeface="微软雅黑"/>
-                          <a:ea typeface="微软雅黑"/>
-                        </a:rPr>
-                        <a:t>200–700</a:t>
+                        <a:rPr sz="1200" b="0">
+                          <a:solidFill>
+                            <a:srgbClr val="1A2A33"/>
+                          </a:solidFill>
+                          <a:latin typeface="微软雅黑"/>
+                          <a:ea typeface="微软雅黑"/>
+                        </a:rPr>
+                        <a:t>900</a:t>
                       </a:r>
                     </a:p>
                   </a:txBody>
@@ -13343,14 +13303,14 @@
                     <a:p>
                       <a:pPr algn="l"/>
                       <a:r>
-                        <a:rPr sz="1100" b="0">
-                          <a:solidFill>
-                            <a:srgbClr val="1A2A33"/>
-                          </a:solidFill>
-                          <a:latin typeface="微软雅黑"/>
-                          <a:ea typeface="微软雅黑"/>
-                        </a:rPr>
-                        <a:t>80–150</a:t>
+                        <a:rPr sz="1200" b="0">
+                          <a:solidFill>
+                            <a:srgbClr val="1A2A33"/>
+                          </a:solidFill>
+                          <a:latin typeface="微软雅黑"/>
+                          <a:ea typeface="微软雅黑"/>
+                        </a:rPr>
+                        <a:t>1,200</a:t>
                       </a:r>
                     </a:p>
                   </a:txBody>
@@ -13367,14 +13327,14 @@
                     <a:p>
                       <a:pPr algn="l"/>
                       <a:r>
-                        <a:rPr sz="1100" b="0">
-                          <a:solidFill>
-                            <a:srgbClr val="1A2A33"/>
-                          </a:solidFill>
-                          <a:latin typeface="微软雅黑"/>
-                          <a:ea typeface="微软雅黑"/>
-                        </a:rPr>
-                        <a:t>220–950</a:t>
+                        <a:rPr sz="1200" b="0">
+                          <a:solidFill>
+                            <a:srgbClr val="1A2A33"/>
+                          </a:solidFill>
+                          <a:latin typeface="微软雅黑"/>
+                          <a:ea typeface="微软雅黑"/>
+                        </a:rPr>
+                        <a:t>约 5,500–6,800</a:t>
                       </a:r>
                     </a:p>
                   </a:txBody>
@@ -13391,14 +13351,14 @@
                     <a:p>
                       <a:pPr algn="l"/>
                       <a:r>
-                        <a:rPr sz="1100" b="0">
-                          <a:solidFill>
-                            <a:srgbClr val="1A2A33"/>
-                          </a:solidFill>
-                          <a:latin typeface="微软雅黑"/>
-                          <a:ea typeface="微软雅黑"/>
-                        </a:rPr>
-                        <a:t>约 50%</a:t>
+                        <a:rPr sz="1200" b="0">
+                          <a:solidFill>
+                            <a:srgbClr val="1A2A33"/>
+                          </a:solidFill>
+                          <a:latin typeface="微软雅黑"/>
+                          <a:ea typeface="微软雅黑"/>
+                        </a:rPr>
+                        <a:t>约 5,000–6,300</a:t>
                       </a:r>
                     </a:p>
                   </a:txBody>
@@ -13409,22 +13369,22 @@
                   </a:tcPr>
                 </a:tc>
               </a:tr>
-              <a:tr h="579120">
-                <a:tc>
-                  <a:txBody>
-                    <a:bodyPr wrap="square"/>
-                    <a:lstStyle/>
-                    <a:p>
-                      <a:pPr algn="l"/>
-                      <a:r>
-                        <a:rPr sz="1100" b="0">
-                          <a:solidFill>
-                            <a:srgbClr val="1A2A33"/>
-                          </a:solidFill>
-                          <a:latin typeface="微软雅黑"/>
-                          <a:ea typeface="微软雅黑"/>
-                        </a:rPr>
-                        <a:t>具身/科技项目</a:t>
+              <a:tr h="640080">
+                <a:tc>
+                  <a:txBody>
+                    <a:bodyPr wrap="square"/>
+                    <a:lstStyle/>
+                    <a:p>
+                      <a:pPr algn="l"/>
+                      <a:r>
+                        <a:rPr sz="1200" b="0">
+                          <a:solidFill>
+                            <a:srgbClr val="1A2A33"/>
+                          </a:solidFill>
+                          <a:latin typeface="微软雅黑"/>
+                          <a:ea typeface="微软雅黑"/>
+                        </a:rPr>
+                        <a:t>就业转化包</a:t>
                       </a:r>
                     </a:p>
                   </a:txBody>
@@ -13441,14 +13401,14 @@
                     <a:p>
                       <a:pPr algn="l"/>
                       <a:r>
-                        <a:rPr sz="1100" b="0">
-                          <a:solidFill>
-                            <a:srgbClr val="1A2A33"/>
-                          </a:solidFill>
-                          <a:latin typeface="微软雅黑"/>
-                          <a:ea typeface="微软雅黑"/>
-                        </a:rPr>
-                        <a:t>5,480</a:t>
+                        <a:rPr sz="1200" b="0">
+                          <a:solidFill>
+                            <a:srgbClr val="1A2A33"/>
+                          </a:solidFill>
+                          <a:latin typeface="微软雅黑"/>
+                          <a:ea typeface="微软雅黑"/>
+                        </a:rPr>
+                        <a:t>9,800</a:t>
                       </a:r>
                     </a:p>
                   </a:txBody>
@@ -13465,14 +13425,14 @@
                     <a:p>
                       <a:pPr algn="l"/>
                       <a:r>
-                        <a:rPr sz="1100" b="0">
-                          <a:solidFill>
-                            <a:srgbClr val="1A2A33"/>
-                          </a:solidFill>
-                          <a:latin typeface="微软雅黑"/>
-                          <a:ea typeface="微软雅黑"/>
-                        </a:rPr>
-                        <a:t>2,000–2,800</a:t>
+                        <a:rPr sz="1200" b="0">
+                          <a:solidFill>
+                            <a:srgbClr val="1A2A33"/>
+                          </a:solidFill>
+                          <a:latin typeface="微软雅黑"/>
+                          <a:ea typeface="微软雅黑"/>
+                        </a:rPr>
+                        <a:t>2,200–3,200</a:t>
                       </a:r>
                     </a:p>
                   </a:txBody>
@@ -13489,14 +13449,14 @@
                     <a:p>
                       <a:pPr algn="l"/>
                       <a:r>
-                        <a:rPr sz="1100" b="0">
-                          <a:solidFill>
-                            <a:srgbClr val="1A2A33"/>
-                          </a:solidFill>
-                          <a:latin typeface="微软雅黑"/>
-                          <a:ea typeface="微软雅黑"/>
-                        </a:rPr>
-                        <a:t>600</a:t>
+                        <a:rPr sz="1200" b="0">
+                          <a:solidFill>
+                            <a:srgbClr val="1A2A33"/>
+                          </a:solidFill>
+                          <a:latin typeface="微软雅黑"/>
+                          <a:ea typeface="微软雅黑"/>
+                        </a:rPr>
+                        <a:t>1,200</a:t>
                       </a:r>
                     </a:p>
                   </a:txBody>
@@ -13513,14 +13473,14 @@
                     <a:p>
                       <a:pPr algn="l"/>
                       <a:r>
-                        <a:rPr sz="1100" b="0">
-                          <a:solidFill>
-                            <a:srgbClr val="1A2A33"/>
-                          </a:solidFill>
-                          <a:latin typeface="微软雅黑"/>
-                          <a:ea typeface="微软雅黑"/>
-                        </a:rPr>
-                        <a:t>900</a:t>
+                        <a:rPr sz="1200" b="0">
+                          <a:solidFill>
+                            <a:srgbClr val="1A2A33"/>
+                          </a:solidFill>
+                          <a:latin typeface="微软雅黑"/>
+                          <a:ea typeface="微软雅黑"/>
+                        </a:rPr>
+                        <a:t>1,000</a:t>
                       </a:r>
                     </a:p>
                   </a:txBody>
@@ -13537,14 +13497,14 @@
                     <a:p>
                       <a:pPr algn="l"/>
                       <a:r>
-                        <a:rPr sz="1100" b="0">
-                          <a:solidFill>
-                            <a:srgbClr val="1A2A33"/>
-                          </a:solidFill>
-                          <a:latin typeface="微软雅黑"/>
-                          <a:ea typeface="微软雅黑"/>
-                        </a:rPr>
-                        <a:t>约 3,900–4,500</a:t>
+                        <a:rPr sz="1200" b="0">
+                          <a:solidFill>
+                            <a:srgbClr val="1A2A33"/>
+                          </a:solidFill>
+                          <a:latin typeface="微软雅黑"/>
+                          <a:ea typeface="微软雅黑"/>
+                        </a:rPr>
+                        <a:t>约 4,800–5,800</a:t>
                       </a:r>
                     </a:p>
                   </a:txBody>
@@ -13561,347 +13521,7 @@
                     <a:p>
                       <a:pPr algn="l"/>
                       <a:r>
-                        <a:rPr sz="1100" b="0">
-                          <a:solidFill>
-                            <a:srgbClr val="1A2A33"/>
-                          </a:solidFill>
-                          <a:latin typeface="微软雅黑"/>
-                          <a:ea typeface="微软雅黑"/>
-                        </a:rPr>
-                        <a:t>约 1,000–1,600</a:t>
-                      </a:r>
-                    </a:p>
-                  </a:txBody>
-                  <a:tcPr marL="45720" marR="45720" marT="18288" marB="18288">
-                    <a:solidFill>
-                      <a:srgbClr val="FFFFFF"/>
-                    </a:solidFill>
-                  </a:tcPr>
-                </a:tc>
-              </a:tr>
-              <a:tr h="579120">
-                <a:tc>
-                  <a:txBody>
-                    <a:bodyPr wrap="square"/>
-                    <a:lstStyle/>
-                    <a:p>
-                      <a:pPr algn="l"/>
-                      <a:r>
-                        <a:rPr sz="1100" b="0">
-                          <a:solidFill>
-                            <a:srgbClr val="1A2A33"/>
-                          </a:solidFill>
-                          <a:latin typeface="微软雅黑"/>
-                          <a:ea typeface="微软雅黑"/>
-                        </a:rPr>
-                        <a:t>上海 AI 通道营</a:t>
-                      </a:r>
-                    </a:p>
-                  </a:txBody>
-                  <a:tcPr marL="45720" marR="45720" marT="18288" marB="18288">
-                    <a:solidFill>
-                      <a:srgbClr val="E8F3F1"/>
-                    </a:solidFill>
-                  </a:tcPr>
-                </a:tc>
-                <a:tc>
-                  <a:txBody>
-                    <a:bodyPr wrap="square"/>
-                    <a:lstStyle/>
-                    <a:p>
-                      <a:pPr algn="l"/>
-                      <a:r>
-                        <a:rPr sz="1100" b="0">
-                          <a:solidFill>
-                            <a:srgbClr val="1A2A33"/>
-                          </a:solidFill>
-                          <a:latin typeface="微软雅黑"/>
-                          <a:ea typeface="微软雅黑"/>
-                        </a:rPr>
-                        <a:t>11,800</a:t>
-                      </a:r>
-                    </a:p>
-                  </a:txBody>
-                  <a:tcPr marL="45720" marR="45720" marT="18288" marB="18288">
-                    <a:solidFill>
-                      <a:srgbClr val="E8F3F1"/>
-                    </a:solidFill>
-                  </a:tcPr>
-                </a:tc>
-                <a:tc>
-                  <a:txBody>
-                    <a:bodyPr wrap="square"/>
-                    <a:lstStyle/>
-                    <a:p>
-                      <a:pPr algn="l"/>
-                      <a:r>
-                        <a:rPr sz="1100" b="0">
-                          <a:solidFill>
-                            <a:srgbClr val="1A2A33"/>
-                          </a:solidFill>
-                          <a:latin typeface="微软雅黑"/>
-                          <a:ea typeface="微软雅黑"/>
-                        </a:rPr>
-                        <a:t>3,000–4,200</a:t>
-                      </a:r>
-                    </a:p>
-                  </a:txBody>
-                  <a:tcPr marL="45720" marR="45720" marT="18288" marB="18288">
-                    <a:solidFill>
-                      <a:srgbClr val="E8F3F1"/>
-                    </a:solidFill>
-                  </a:tcPr>
-                </a:tc>
-                <a:tc>
-                  <a:txBody>
-                    <a:bodyPr wrap="square"/>
-                    <a:lstStyle/>
-                    <a:p>
-                      <a:pPr algn="l"/>
-                      <a:r>
-                        <a:rPr sz="1100" b="0">
-                          <a:solidFill>
-                            <a:srgbClr val="1A2A33"/>
-                          </a:solidFill>
-                          <a:latin typeface="微软雅黑"/>
-                          <a:ea typeface="微软雅黑"/>
-                        </a:rPr>
-                        <a:t>900</a:t>
-                      </a:r>
-                    </a:p>
-                  </a:txBody>
-                  <a:tcPr marL="45720" marR="45720" marT="18288" marB="18288">
-                    <a:solidFill>
-                      <a:srgbClr val="E8F3F1"/>
-                    </a:solidFill>
-                  </a:tcPr>
-                </a:tc>
-                <a:tc>
-                  <a:txBody>
-                    <a:bodyPr wrap="square"/>
-                    <a:lstStyle/>
-                    <a:p>
-                      <a:pPr algn="l"/>
-                      <a:r>
-                        <a:rPr sz="1100" b="0">
-                          <a:solidFill>
-                            <a:srgbClr val="1A2A33"/>
-                          </a:solidFill>
-                          <a:latin typeface="微软雅黑"/>
-                          <a:ea typeface="微软雅黑"/>
-                        </a:rPr>
-                        <a:t>1,200</a:t>
-                      </a:r>
-                    </a:p>
-                  </a:txBody>
-                  <a:tcPr marL="45720" marR="45720" marT="18288" marB="18288">
-                    <a:solidFill>
-                      <a:srgbClr val="E8F3F1"/>
-                    </a:solidFill>
-                  </a:tcPr>
-                </a:tc>
-                <a:tc>
-                  <a:txBody>
-                    <a:bodyPr wrap="square"/>
-                    <a:lstStyle/>
-                    <a:p>
-                      <a:pPr algn="l"/>
-                      <a:r>
-                        <a:rPr sz="1100" b="0">
-                          <a:solidFill>
-                            <a:srgbClr val="1A2A33"/>
-                          </a:solidFill>
-                          <a:latin typeface="微软雅黑"/>
-                          <a:ea typeface="微软雅黑"/>
-                        </a:rPr>
-                        <a:t>约 5,500–6,800</a:t>
-                      </a:r>
-                    </a:p>
-                  </a:txBody>
-                  <a:tcPr marL="45720" marR="45720" marT="18288" marB="18288">
-                    <a:solidFill>
-                      <a:srgbClr val="E8F3F1"/>
-                    </a:solidFill>
-                  </a:tcPr>
-                </a:tc>
-                <a:tc>
-                  <a:txBody>
-                    <a:bodyPr wrap="square"/>
-                    <a:lstStyle/>
-                    <a:p>
-                      <a:pPr algn="l"/>
-                      <a:r>
-                        <a:rPr sz="1100" b="0">
-                          <a:solidFill>
-                            <a:srgbClr val="1A2A33"/>
-                          </a:solidFill>
-                          <a:latin typeface="微软雅黑"/>
-                          <a:ea typeface="微软雅黑"/>
-                        </a:rPr>
-                        <a:t>约 5,000–6,300</a:t>
-                      </a:r>
-                    </a:p>
-                  </a:txBody>
-                  <a:tcPr marL="45720" marR="45720" marT="18288" marB="18288">
-                    <a:solidFill>
-                      <a:srgbClr val="E8F3F1"/>
-                    </a:solidFill>
-                  </a:tcPr>
-                </a:tc>
-              </a:tr>
-              <a:tr h="579120">
-                <a:tc>
-                  <a:txBody>
-                    <a:bodyPr wrap="square"/>
-                    <a:lstStyle/>
-                    <a:p>
-                      <a:pPr algn="l"/>
-                      <a:r>
-                        <a:rPr sz="1100" b="0">
-                          <a:solidFill>
-                            <a:srgbClr val="1A2A33"/>
-                          </a:solidFill>
-                          <a:latin typeface="微软雅黑"/>
-                          <a:ea typeface="微软雅黑"/>
-                        </a:rPr>
-                        <a:t>就业转化包</a:t>
-                      </a:r>
-                    </a:p>
-                  </a:txBody>
-                  <a:tcPr marL="45720" marR="45720" marT="18288" marB="18288">
-                    <a:solidFill>
-                      <a:srgbClr val="FFFFFF"/>
-                    </a:solidFill>
-                  </a:tcPr>
-                </a:tc>
-                <a:tc>
-                  <a:txBody>
-                    <a:bodyPr wrap="square"/>
-                    <a:lstStyle/>
-                    <a:p>
-                      <a:pPr algn="l"/>
-                      <a:r>
-                        <a:rPr sz="1100" b="0">
-                          <a:solidFill>
-                            <a:srgbClr val="1A2A33"/>
-                          </a:solidFill>
-                          <a:latin typeface="微软雅黑"/>
-                          <a:ea typeface="微软雅黑"/>
-                        </a:rPr>
-                        <a:t>9,800</a:t>
-                      </a:r>
-                    </a:p>
-                  </a:txBody>
-                  <a:tcPr marL="45720" marR="45720" marT="18288" marB="18288">
-                    <a:solidFill>
-                      <a:srgbClr val="FFFFFF"/>
-                    </a:solidFill>
-                  </a:tcPr>
-                </a:tc>
-                <a:tc>
-                  <a:txBody>
-                    <a:bodyPr wrap="square"/>
-                    <a:lstStyle/>
-                    <a:p>
-                      <a:pPr algn="l"/>
-                      <a:r>
-                        <a:rPr sz="1100" b="0">
-                          <a:solidFill>
-                            <a:srgbClr val="1A2A33"/>
-                          </a:solidFill>
-                          <a:latin typeface="微软雅黑"/>
-                          <a:ea typeface="微软雅黑"/>
-                        </a:rPr>
-                        <a:t>2,200–3,200</a:t>
-                      </a:r>
-                    </a:p>
-                  </a:txBody>
-                  <a:tcPr marL="45720" marR="45720" marT="18288" marB="18288">
-                    <a:solidFill>
-                      <a:srgbClr val="FFFFFF"/>
-                    </a:solidFill>
-                  </a:tcPr>
-                </a:tc>
-                <a:tc>
-                  <a:txBody>
-                    <a:bodyPr wrap="square"/>
-                    <a:lstStyle/>
-                    <a:p>
-                      <a:pPr algn="l"/>
-                      <a:r>
-                        <a:rPr sz="1100" b="0">
-                          <a:solidFill>
-                            <a:srgbClr val="1A2A33"/>
-                          </a:solidFill>
-                          <a:latin typeface="微软雅黑"/>
-                          <a:ea typeface="微软雅黑"/>
-                        </a:rPr>
-                        <a:t>1,200</a:t>
-                      </a:r>
-                    </a:p>
-                  </a:txBody>
-                  <a:tcPr marL="45720" marR="45720" marT="18288" marB="18288">
-                    <a:solidFill>
-                      <a:srgbClr val="FFFFFF"/>
-                    </a:solidFill>
-                  </a:tcPr>
-                </a:tc>
-                <a:tc>
-                  <a:txBody>
-                    <a:bodyPr wrap="square"/>
-                    <a:lstStyle/>
-                    <a:p>
-                      <a:pPr algn="l"/>
-                      <a:r>
-                        <a:rPr sz="1100" b="0">
-                          <a:solidFill>
-                            <a:srgbClr val="1A2A33"/>
-                          </a:solidFill>
-                          <a:latin typeface="微软雅黑"/>
-                          <a:ea typeface="微软雅黑"/>
-                        </a:rPr>
-                        <a:t>1,000</a:t>
-                      </a:r>
-                    </a:p>
-                  </a:txBody>
-                  <a:tcPr marL="45720" marR="45720" marT="18288" marB="18288">
-                    <a:solidFill>
-                      <a:srgbClr val="FFFFFF"/>
-                    </a:solidFill>
-                  </a:tcPr>
-                </a:tc>
-                <a:tc>
-                  <a:txBody>
-                    <a:bodyPr wrap="square"/>
-                    <a:lstStyle/>
-                    <a:p>
-                      <a:pPr algn="l"/>
-                      <a:r>
-                        <a:rPr sz="1100" b="0">
-                          <a:solidFill>
-                            <a:srgbClr val="1A2A33"/>
-                          </a:solidFill>
-                          <a:latin typeface="微软雅黑"/>
-                          <a:ea typeface="微软雅黑"/>
-                        </a:rPr>
-                        <a:t>约 4,800–5,800</a:t>
-                      </a:r>
-                    </a:p>
-                  </a:txBody>
-                  <a:tcPr marL="45720" marR="45720" marT="18288" marB="18288">
-                    <a:solidFill>
-                      <a:srgbClr val="FFFFFF"/>
-                    </a:solidFill>
-                  </a:tcPr>
-                </a:tc>
-                <a:tc>
-                  <a:txBody>
-                    <a:bodyPr wrap="square"/>
-                    <a:lstStyle/>
-                    <a:p>
-                      <a:pPr algn="l"/>
-                      <a:r>
-                        <a:rPr sz="1100" b="0">
+                        <a:rPr sz="1200" b="0">
                           <a:solidFill>
                             <a:srgbClr val="1A2A33"/>
                           </a:solidFill>
@@ -13931,8 +13551,8 @@
         </p:nvSpPr>
         <p:spPr>
           <a:xfrm>
-            <a:off x="457200" y="5029200"/>
-            <a:ext cx="11247120" cy="1280160"/>
+            <a:off x="457200" y="4206240"/>
+            <a:ext cx="11247120" cy="2011680"/>
           </a:xfrm>
           <a:prstGeom prst="rect">
             <a:avLst/>
@@ -13976,6 +13596,23 @@
                 <a:ea typeface="微软雅黑"/>
               </a:rPr>
               <a:t>•  首批上海具身智能企业：建议按 2,000–3,200 元/人谈价；AI 头部通道按 3,000–4,200 元/人预留</a:t>
+            </a:r>
+          </a:p>
+          <a:p>
+            <a:pPr algn="l">
+              <a:lnSpc>
+                <a:spcPct val="120000"/>
+              </a:lnSpc>
+            </a:pPr>
+            <a:r>
+              <a:rPr sz="1300" b="0">
+                <a:solidFill>
+                  <a:srgbClr val="1A2A33"/>
+                </a:solidFill>
+                <a:latin typeface="微软雅黑"/>
+                <a:ea typeface="微软雅黑"/>
+              </a:rPr>
+              <a:t>•  不再做低价开证明：避免「费用低、风险高、占用带宽」的业务拖累主航道</a:t>
             </a:r>
           </a:p>
           <a:p>
@@ -16816,7 +16453,7 @@
                 <a:latin typeface="微软雅黑"/>
                 <a:ea typeface="微软雅黑"/>
               </a:rPr>
-              <a:t>编号证明</a:t>
+              <a:t>项目结业证明</a:t>
             </a:r>
           </a:p>
           <a:p>
@@ -16829,7 +16466,7 @@
                 <a:latin typeface="微软雅黑"/>
                 <a:ea typeface="微软雅黑"/>
               </a:rPr>
-              <a:t>推荐信/申报可选</a:t>
+              <a:t>推荐信可加购</a:t>
             </a:r>
           </a:p>
         </p:txBody>
@@ -17043,7 +16680,7 @@
                           <a:latin typeface="微软雅黑"/>
                           <a:ea typeface="微软雅黑"/>
                         </a:rPr>
-                        <a:t>匹配方案确认书</a:t>
+                        <a:t>高价值档匹配方案确认书</a:t>
                       </a:r>
                     </a:p>
                   </a:txBody>
@@ -17239,7 +16876,7 @@
                           <a:latin typeface="微软雅黑"/>
                           <a:ea typeface="微软雅黑"/>
                         </a:rPr>
-                        <a:t>周报齐全</a:t>
+                        <a:t>周报齐全 + 真实课题产出</a:t>
                       </a:r>
                     </a:p>
                   </a:txBody>
@@ -17313,7 +16950,7 @@
                           <a:latin typeface="微软雅黑"/>
                           <a:ea typeface="微软雅黑"/>
                         </a:rPr>
-                        <a:t>结业后 3 个工作日出具证明</a:t>
+                        <a:t>结业后 3 个工作日</a:t>
                       </a:r>
                     </a:p>
                   </a:txBody>
@@ -17337,7 +16974,7 @@
                           <a:latin typeface="微软雅黑"/>
                           <a:ea typeface="微软雅黑"/>
                         </a:rPr>
-                        <a:t>证明编号可查</a:t>
+                        <a:t>项目证明（非单独售卖）</a:t>
                       </a:r>
                     </a:p>
                   </a:txBody>
